--- a/media/resources/files/Onduktar_Akcha_KalkulyatorsuzIshtoo_XjanaO_0Vbj9Kp.pptx
+++ b/media/resources/files/Onduktar_Akcha_KalkulyatorsuzIshtoo_XjanaO_0Vbj9Kp.pptx
@@ -12934,7 +12934,7 @@
                 <a:ea typeface="+mn-ea"/>
                 <a:cs typeface="+mn-cs"/>
               </a:rPr>
-              <a:t>Турдуу пикирлер учун ыраазычылык билдиребиз.</a:t>
+              <a:t>Түрдүү пикирлер үчүн ыраазычылык билдиребиз.</a:t>
             </a:r>
           </a:p>
           <a:p>

--- a/media/resources/files/Onduktar_Akcha_KalkulyatorsuzIshtoo_XjanaO_0Vbj9Kp.pptx
+++ b/media/resources/files/Onduktar_Akcha_KalkulyatorsuzIshtoo_XjanaO_0Vbj9Kp.pptx
@@ -3490,7 +3490,7 @@
                 <a:ea typeface="+mn-ea"/>
                 <a:cs typeface="Arial" panose="020B0604020202020204" pitchFamily="34" charset="0"/>
               </a:rPr>
-              <a:t>c</a:t>
+              <a:t>с</a:t>
             </a:r>
             <a:r>
               <a:rPr lang="ky-KG" sz="2000" u="sng" dirty="0">
@@ -3959,7 +3959,7 @@
                 <a:ea typeface="+mn-ea"/>
                 <a:cs typeface="Arial" panose="020B0604020202020204" pitchFamily="34" charset="0"/>
               </a:rPr>
-              <a:t>Мугалим үчүн жооп баракчасы жана таратма материалдар камтылган.</a:t>
+              <a:t>Мугалим үчүн жооп барагы жана таратма материалдар бар.</a:t>
             </a:r>
           </a:p>
           <a:p>
@@ -4028,7 +4028,7 @@
                 <a:ea typeface="+mn-ea"/>
                 <a:cs typeface="Arial" panose="020B0604020202020204" pitchFamily="34" charset="0"/>
               </a:rPr>
-              <a:t>Кайсы команда туура жооп бергенине жараша '</a:t>
+              <a:t>Туура жооп берген командага жараша «</a:t>
             </a:r>
             <a:r>
               <a:rPr kumimoji="0" lang="en-GB" sz="2000" b="0" i="0" u="sng" strike="noStrike" kern="1200" cap="none" spc="0" normalizeH="0" baseline="0" noProof="0" dirty="0">
@@ -4045,7 +4045,7 @@
                 <a:ea typeface="+mn-ea"/>
                 <a:cs typeface="Arial" panose="020B0604020202020204" pitchFamily="34" charset="0"/>
               </a:rPr>
-              <a:t>X' </a:t>
+              <a:t>X» </a:t>
             </a:r>
             <a:r>
               <a:rPr kumimoji="0" lang="ru-RU" sz="2000" b="0" i="0" u="sng" strike="noStrike" kern="1200" cap="none" spc="0" normalizeH="0" baseline="0" noProof="0" dirty="0">
@@ -4062,7 +4062,7 @@
                 <a:ea typeface="+mn-ea"/>
                 <a:cs typeface="Arial" panose="020B0604020202020204" pitchFamily="34" charset="0"/>
               </a:rPr>
-              <a:t>же '</a:t>
+              <a:t>же «</a:t>
             </a:r>
             <a:r>
               <a:rPr kumimoji="0" lang="en-GB" sz="2000" b="0" i="0" u="sng" strike="noStrike" kern="1200" cap="none" spc="0" normalizeH="0" baseline="0" noProof="0" dirty="0">
@@ -4079,7 +4079,7 @@
                 <a:ea typeface="+mn-ea"/>
                 <a:cs typeface="Arial" panose="020B0604020202020204" pitchFamily="34" charset="0"/>
               </a:rPr>
-              <a:t>O' </a:t>
+              <a:t>O» </a:t>
             </a:r>
             <a:r>
               <a:rPr kumimoji="0" lang="ru-RU" sz="2000" b="0" i="0" u="sng" strike="noStrike" kern="1200" cap="none" spc="0" normalizeH="0" baseline="0" noProof="0" dirty="0">
@@ -4096,7 +4096,7 @@
                 <a:ea typeface="+mn-ea"/>
                 <a:cs typeface="Arial" panose="020B0604020202020204" pitchFamily="34" charset="0"/>
               </a:rPr>
-              <a:t>баскычын басыңыз/тийип коюңуз</a:t>
+              <a:t>баскычын басыңыз</a:t>
             </a:r>
             <a:r>
               <a:rPr kumimoji="0" lang="en-GB" sz="2000" b="0" i="0" u="none" strike="noStrike" kern="1200" cap="none" spc="0" normalizeH="0" baseline="0" noProof="0" dirty="0">
@@ -4945,7 +4945,7 @@
                   <a:schemeClr val="tx1"/>
                 </a:solidFill>
               </a:rPr>
-              <a:t>26.63</a:t>
+              <a:t>26,63</a:t>
             </a:r>
             <a:r>
               <a:rPr lang="ky-KG" sz="2400" dirty="0">
@@ -5098,7 +5098,7 @@
                   <a:schemeClr val="tx1"/>
                 </a:solidFill>
               </a:rPr>
-              <a:t>137.59</a:t>
+              <a:t>137,59</a:t>
             </a:r>
           </a:p>
         </p:txBody>
@@ -5252,7 +5252,7 @@
                   <a:schemeClr val="tx1"/>
                 </a:solidFill>
               </a:rPr>
-              <a:t>266.30</a:t>
+              <a:t>266,30</a:t>
             </a:r>
           </a:p>
         </p:txBody>
@@ -5480,7 +5480,7 @@
                   <a:schemeClr val="tx1"/>
                 </a:solidFill>
               </a:rPr>
-              <a:t>33.29</a:t>
+              <a:t>33,29</a:t>
             </a:r>
           </a:p>
         </p:txBody>
@@ -5627,7 +5627,7 @@
                   <a:schemeClr val="tx1"/>
                 </a:solidFill>
               </a:rPr>
-              <a:t>72.12</a:t>
+              <a:t>72,12</a:t>
             </a:r>
           </a:p>
         </p:txBody>
@@ -5774,7 +5774,7 @@
                   <a:schemeClr val="tx1"/>
                 </a:solidFill>
               </a:rPr>
-              <a:t>49.93</a:t>
+              <a:t>49,93</a:t>
             </a:r>
           </a:p>
         </p:txBody>
@@ -6218,7 +6218,7 @@
                   <a:schemeClr val="tx1"/>
                 </a:solidFill>
               </a:rPr>
-              <a:t>71.01</a:t>
+              <a:t>71,01</a:t>
             </a:r>
           </a:p>
         </p:txBody>
@@ -6284,7 +6284,7 @@
                   <a:schemeClr val="tx1"/>
                 </a:solidFill>
               </a:rPr>
-              <a:t>35.51</a:t>
+              <a:t>35,51</a:t>
             </a:r>
           </a:p>
         </p:txBody>
@@ -6350,7 +6350,7 @@
                   <a:schemeClr val="tx1"/>
                 </a:solidFill>
               </a:rPr>
-              <a:t>64.36</a:t>
+              <a:t>64,36</a:t>
             </a:r>
           </a:p>
         </p:txBody>
@@ -9506,7 +9506,7 @@
                   <a:schemeClr val="tx1"/>
                 </a:solidFill>
               </a:rPr>
-              <a:t>26.63</a:t>
+              <a:t>26,63</a:t>
             </a:r>
             <a:r>
               <a:rPr lang="ky-KG" sz="2400" dirty="0">
@@ -9659,7 +9659,7 @@
                   <a:schemeClr val="tx1"/>
                 </a:solidFill>
               </a:rPr>
-              <a:t>137.59</a:t>
+              <a:t>137,59</a:t>
             </a:r>
           </a:p>
         </p:txBody>
@@ -9813,7 +9813,7 @@
                   <a:schemeClr val="tx1"/>
                 </a:solidFill>
               </a:rPr>
-              <a:t>266.30</a:t>
+              <a:t>266,30</a:t>
             </a:r>
           </a:p>
         </p:txBody>
@@ -10041,7 +10041,7 @@
                   <a:schemeClr val="tx1"/>
                 </a:solidFill>
               </a:rPr>
-              <a:t>33.29</a:t>
+              <a:t>33,29</a:t>
             </a:r>
           </a:p>
         </p:txBody>
@@ -10188,7 +10188,7 @@
                   <a:schemeClr val="tx1"/>
                 </a:solidFill>
               </a:rPr>
-              <a:t>72.12</a:t>
+              <a:t>72,12</a:t>
             </a:r>
           </a:p>
         </p:txBody>
@@ -10335,7 +10335,7 @@
                   <a:schemeClr val="tx1"/>
                 </a:solidFill>
               </a:rPr>
-              <a:t>49.93</a:t>
+              <a:t>49,93</a:t>
             </a:r>
           </a:p>
         </p:txBody>
@@ -10779,7 +10779,7 @@
                   <a:schemeClr val="tx1"/>
                 </a:solidFill>
               </a:rPr>
-              <a:t>71.01</a:t>
+              <a:t>71,01</a:t>
             </a:r>
           </a:p>
         </p:txBody>
@@ -10845,7 +10845,7 @@
                   <a:schemeClr val="tx1"/>
                 </a:solidFill>
               </a:rPr>
-              <a:t>35.51</a:t>
+              <a:t>35,51</a:t>
             </a:r>
           </a:p>
         </p:txBody>
@@ -10911,7 +10911,7 @@
                   <a:schemeClr val="tx1"/>
                 </a:solidFill>
               </a:rPr>
-              <a:t>64.36</a:t>
+              <a:t>64,36</a:t>
             </a:r>
           </a:p>
         </p:txBody>
@@ -11803,7 +11803,7 @@
                   <a:schemeClr val="tx1"/>
                 </a:solidFill>
               </a:rPr>
-              <a:t>159.78</a:t>
+              <a:t>159,78</a:t>
             </a:r>
             <a:r>
               <a:rPr lang="ky-KG" sz="2400" dirty="0">
@@ -11885,7 +11885,7 @@
                   <a:schemeClr val="tx1"/>
                 </a:solidFill>
               </a:rPr>
-              <a:t>177.5</a:t>
+              <a:t>177,5</a:t>
             </a:r>
             <a:r>
               <a:rPr lang="ky-KG" sz="2400" dirty="0">
@@ -11967,7 +11967,7 @@
                   <a:schemeClr val="tx1"/>
                 </a:solidFill>
               </a:rPr>
-              <a:t>275.18</a:t>
+              <a:t>275,18</a:t>
             </a:r>
             <a:r>
               <a:rPr lang="ky-KG" sz="2400" dirty="0">
@@ -12049,7 +12049,7 @@
                   <a:schemeClr val="tx1"/>
                 </a:solidFill>
               </a:rPr>
-              <a:t>355.07</a:t>
+              <a:t>355,07</a:t>
             </a:r>
             <a:r>
               <a:rPr lang="ky-KG" sz="2400" dirty="0">
@@ -12131,7 +12131,7 @@
                   <a:schemeClr val="tx1"/>
                 </a:solidFill>
               </a:rPr>
-              <a:t>1464.66</a:t>
+              <a:t>1464,66</a:t>
             </a:r>
             <a:r>
               <a:rPr lang="ky-KG" sz="2400" dirty="0">
@@ -12213,7 +12213,7 @@
                   <a:schemeClr val="tx1"/>
                 </a:solidFill>
               </a:rPr>
-              <a:t>166.44</a:t>
+              <a:t>166,44</a:t>
             </a:r>
             <a:r>
               <a:rPr lang="ky-KG" sz="2400" dirty="0">
@@ -12295,7 +12295,7 @@
                   <a:schemeClr val="tx1"/>
                 </a:solidFill>
               </a:rPr>
-              <a:t>349.52</a:t>
+              <a:t>349,52</a:t>
             </a:r>
             <a:r>
               <a:rPr lang="ky-KG" sz="2400" dirty="0">
@@ -12377,7 +12377,7 @@
                   <a:schemeClr val="tx1"/>
                 </a:solidFill>
               </a:rPr>
-              <a:t>288.49</a:t>
+              <a:t>288,49</a:t>
             </a:r>
             <a:r>
               <a:rPr lang="ky-KG" sz="2400" dirty="0">
@@ -12459,7 +12459,7 @@
                   <a:schemeClr val="tx1"/>
                 </a:solidFill>
               </a:rPr>
-              <a:t>450.49</a:t>
+              <a:t>450,49</a:t>
             </a:r>
             <a:r>
               <a:rPr lang="ky-KG" sz="2400" dirty="0">
